--- a/templates/sample_template2.pptx
+++ b/templates/sample_template2.pptx
@@ -203,7 +203,7 @@
           <a:p>
             <a:fld id="{9C88139C-5FA4-4293-8521-06E51CE92734}" type="datetimeFigureOut">
               <a:rPr lang="ko-KR" altLang="en-US" smtClean="0"/>
-              <a:t>2026-05-20</a:t>
+              <a:t>2026-06-17</a:t>
             </a:fld>
             <a:endParaRPr lang="ko-KR" altLang="en-US"/>
           </a:p>
@@ -685,7 +685,7 @@
           <a:p>
             <a:fld id="{D5721AC3-A44A-44B1-BD7B-FCC91621D26C}" type="datetimeFigureOut">
               <a:rPr lang="ko-KR" altLang="en-US" smtClean="0"/>
-              <a:t>2026-05-20</a:t>
+              <a:t>2026-06-17</a:t>
             </a:fld>
             <a:endParaRPr lang="ko-KR" altLang="en-US"/>
           </a:p>
@@ -855,7 +855,7 @@
           <a:p>
             <a:fld id="{D5721AC3-A44A-44B1-BD7B-FCC91621D26C}" type="datetimeFigureOut">
               <a:rPr lang="ko-KR" altLang="en-US" smtClean="0"/>
-              <a:t>2026-05-20</a:t>
+              <a:t>2026-06-17</a:t>
             </a:fld>
             <a:endParaRPr lang="ko-KR" altLang="en-US"/>
           </a:p>
@@ -1035,7 +1035,7 @@
           <a:p>
             <a:fld id="{D5721AC3-A44A-44B1-BD7B-FCC91621D26C}" type="datetimeFigureOut">
               <a:rPr lang="ko-KR" altLang="en-US" smtClean="0"/>
-              <a:t>2026-05-20</a:t>
+              <a:t>2026-06-17</a:t>
             </a:fld>
             <a:endParaRPr lang="ko-KR" altLang="en-US"/>
           </a:p>
@@ -1494,7 +1494,7 @@
           <a:p>
             <a:fld id="{D5721AC3-A44A-44B1-BD7B-FCC91621D26C}" type="datetimeFigureOut">
               <a:rPr lang="ko-KR" altLang="en-US" smtClean="0"/>
-              <a:t>2026-05-20</a:t>
+              <a:t>2026-06-17</a:t>
             </a:fld>
             <a:endParaRPr lang="ko-KR" altLang="en-US"/>
           </a:p>
@@ -1738,7 +1738,7 @@
           <a:p>
             <a:fld id="{D5721AC3-A44A-44B1-BD7B-FCC91621D26C}" type="datetimeFigureOut">
               <a:rPr lang="ko-KR" altLang="en-US" smtClean="0"/>
-              <a:t>2026-05-20</a:t>
+              <a:t>2026-06-17</a:t>
             </a:fld>
             <a:endParaRPr lang="ko-KR" altLang="en-US"/>
           </a:p>
@@ -1970,7 +1970,7 @@
           <a:p>
             <a:fld id="{D5721AC3-A44A-44B1-BD7B-FCC91621D26C}" type="datetimeFigureOut">
               <a:rPr lang="ko-KR" altLang="en-US" smtClean="0"/>
-              <a:t>2026-05-20</a:t>
+              <a:t>2026-06-17</a:t>
             </a:fld>
             <a:endParaRPr lang="ko-KR" altLang="en-US"/>
           </a:p>
@@ -2337,7 +2337,7 @@
           <a:p>
             <a:fld id="{D5721AC3-A44A-44B1-BD7B-FCC91621D26C}" type="datetimeFigureOut">
               <a:rPr lang="ko-KR" altLang="en-US" smtClean="0"/>
-              <a:t>2026-05-20</a:t>
+              <a:t>2026-06-17</a:t>
             </a:fld>
             <a:endParaRPr lang="ko-KR" altLang="en-US"/>
           </a:p>
@@ -2455,7 +2455,7 @@
           <a:p>
             <a:fld id="{D5721AC3-A44A-44B1-BD7B-FCC91621D26C}" type="datetimeFigureOut">
               <a:rPr lang="ko-KR" altLang="en-US" smtClean="0"/>
-              <a:t>2026-05-20</a:t>
+              <a:t>2026-06-17</a:t>
             </a:fld>
             <a:endParaRPr lang="ko-KR" altLang="en-US"/>
           </a:p>
@@ -2550,7 +2550,7 @@
           <a:p>
             <a:fld id="{D5721AC3-A44A-44B1-BD7B-FCC91621D26C}" type="datetimeFigureOut">
               <a:rPr lang="ko-KR" altLang="en-US" smtClean="0"/>
-              <a:t>2026-05-20</a:t>
+              <a:t>2026-06-17</a:t>
             </a:fld>
             <a:endParaRPr lang="ko-KR" altLang="en-US"/>
           </a:p>
@@ -2827,7 +2827,7 @@
           <a:p>
             <a:fld id="{D5721AC3-A44A-44B1-BD7B-FCC91621D26C}" type="datetimeFigureOut">
               <a:rPr lang="ko-KR" altLang="en-US" smtClean="0"/>
-              <a:t>2026-05-20</a:t>
+              <a:t>2026-06-17</a:t>
             </a:fld>
             <a:endParaRPr lang="ko-KR" altLang="en-US"/>
           </a:p>
@@ -3084,7 +3084,7 @@
           <a:p>
             <a:fld id="{D5721AC3-A44A-44B1-BD7B-FCC91621D26C}" type="datetimeFigureOut">
               <a:rPr lang="ko-KR" altLang="en-US" smtClean="0"/>
-              <a:t>2026-05-20</a:t>
+              <a:t>2026-06-17</a:t>
             </a:fld>
             <a:endParaRPr lang="ko-KR" altLang="en-US"/>
           </a:p>
@@ -3297,7 +3297,7 @@
           <a:p>
             <a:fld id="{D5721AC3-A44A-44B1-BD7B-FCC91621D26C}" type="datetimeFigureOut">
               <a:rPr lang="ko-KR" altLang="en-US" smtClean="0"/>
-              <a:t>2026-05-20</a:t>
+              <a:t>2026-06-17</a:t>
             </a:fld>
             <a:endParaRPr lang="ko-KR" altLang="en-US"/>
           </a:p>
@@ -4614,10 +4614,10 @@
       </p:grpSpPr>
       <p:pic>
         <p:nvPicPr>
-          <p:cNvPr id="80" name="그림 79" descr="항공 사진, 지도, 조감도, 도시 디자인이(가) 표시된 사진&#10;&#10;AI 생성 콘텐츠는 정확하지 않을 수 있습니다.">
+          <p:cNvPr id="5" name="그림 4">
             <a:extLst>
               <a:ext uri="{FF2B5EF4-FFF2-40B4-BE49-F238E27FC236}">
-                <a16:creationId xmlns:a16="http://schemas.microsoft.com/office/drawing/2014/main" id="{62109C71-E88B-21AD-3BF3-EA4F42969E0E}"/>
+                <a16:creationId xmlns:a16="http://schemas.microsoft.com/office/drawing/2014/main" id="{96DBFBE8-032C-2391-8437-DC642B17D244}"/>
               </a:ext>
             </a:extLst>
           </p:cNvPr>
@@ -4627,22 +4627,22 @@
           <p:nvPr/>
         </p:nvPicPr>
         <p:blipFill>
-          <a:blip r:embed="rId3" cstate="print">
+          <a:blip r:embed="rId3">
             <a:extLst>
               <a:ext uri="{28A0092B-C50C-407E-A947-70E740481C1C}">
-                <a14:useLocalDpi xmlns:a14="http://schemas.microsoft.com/office/drawing/2010/main"/>
+                <a14:useLocalDpi xmlns:a14="http://schemas.microsoft.com/office/drawing/2010/main" val="0"/>
               </a:ext>
             </a:extLst>
           </a:blip>
-          <a:srcRect l="18085" t="24922" r="17111" b="24074"/>
+          <a:srcRect l="12399" t="24138" r="13621" b="16444"/>
           <a:stretch>
             <a:fillRect/>
           </a:stretch>
         </p:blipFill>
         <p:spPr>
           <a:xfrm>
-            <a:off x="0" y="849084"/>
-            <a:ext cx="9904821" cy="6008915"/>
+            <a:off x="-18948" y="923553"/>
+            <a:ext cx="9916648" cy="5910886"/>
           </a:xfrm>
           <a:prstGeom prst="rect">
             <a:avLst/>
@@ -5210,7 +5210,7 @@
         </p:blipFill>
         <p:spPr>
           <a:xfrm>
-            <a:off x="7483673" y="1634296"/>
+            <a:off x="11062203" y="3008211"/>
             <a:ext cx="538515" cy="490771"/>
           </a:xfrm>
           <a:prstGeom prst="rect">
@@ -5223,141 +5223,6 @@
           </a:ln>
         </p:spPr>
       </p:pic>
-      <p:cxnSp>
-        <p:nvCxnSpPr>
-          <p:cNvPr id="76" name="직선 화살표 연결선 75">
-            <a:extLst>
-              <a:ext uri="{FF2B5EF4-FFF2-40B4-BE49-F238E27FC236}">
-                <a16:creationId xmlns:a16="http://schemas.microsoft.com/office/drawing/2014/main" id="{8B4E25FE-3E67-0474-509B-ACED8285ADA0}"/>
-              </a:ext>
-            </a:extLst>
-          </p:cNvPr>
-          <p:cNvCxnSpPr>
-            <a:cxnSpLocks/>
-          </p:cNvCxnSpPr>
-          <p:nvPr/>
-        </p:nvCxnSpPr>
-        <p:spPr>
-          <a:xfrm flipH="1">
-            <a:off x="8457506" y="2174508"/>
-            <a:ext cx="321397" cy="658972"/>
-          </a:xfrm>
-          <a:prstGeom prst="straightConnector1">
-            <a:avLst/>
-          </a:prstGeom>
-          <a:ln w="38100">
-            <a:solidFill>
-              <a:srgbClr val="FF0000"/>
-            </a:solidFill>
-            <a:prstDash val="sysDash"/>
-            <a:tailEnd type="triangle"/>
-          </a:ln>
-        </p:spPr>
-        <p:style>
-          <a:lnRef idx="1">
-            <a:schemeClr val="accent1"/>
-          </a:lnRef>
-          <a:fillRef idx="0">
-            <a:schemeClr val="accent1"/>
-          </a:fillRef>
-          <a:effectRef idx="0">
-            <a:schemeClr val="accent1"/>
-          </a:effectRef>
-          <a:fontRef idx="minor">
-            <a:schemeClr val="tx1"/>
-          </a:fontRef>
-        </p:style>
-      </p:cxnSp>
-      <p:cxnSp>
-        <p:nvCxnSpPr>
-          <p:cNvPr id="64" name="직선 화살표 연결선 63">
-            <a:extLst>
-              <a:ext uri="{FF2B5EF4-FFF2-40B4-BE49-F238E27FC236}">
-                <a16:creationId xmlns:a16="http://schemas.microsoft.com/office/drawing/2014/main" id="{22372A38-A96D-3FC5-D5E6-627E89B7F9B8}"/>
-              </a:ext>
-            </a:extLst>
-          </p:cNvPr>
-          <p:cNvCxnSpPr>
-            <a:cxnSpLocks/>
-          </p:cNvCxnSpPr>
-          <p:nvPr/>
-        </p:nvCxnSpPr>
-        <p:spPr>
-          <a:xfrm>
-            <a:off x="8348027" y="3323253"/>
-            <a:ext cx="142830" cy="315686"/>
-          </a:xfrm>
-          <a:prstGeom prst="straightConnector1">
-            <a:avLst/>
-          </a:prstGeom>
-          <a:ln w="38100">
-            <a:solidFill>
-              <a:srgbClr val="FF0000"/>
-            </a:solidFill>
-            <a:prstDash val="sysDash"/>
-            <a:tailEnd type="triangle"/>
-          </a:ln>
-        </p:spPr>
-        <p:style>
-          <a:lnRef idx="1">
-            <a:schemeClr val="accent1"/>
-          </a:lnRef>
-          <a:fillRef idx="0">
-            <a:schemeClr val="accent1"/>
-          </a:fillRef>
-          <a:effectRef idx="0">
-            <a:schemeClr val="accent1"/>
-          </a:effectRef>
-          <a:fontRef idx="minor">
-            <a:schemeClr val="tx1"/>
-          </a:fontRef>
-        </p:style>
-      </p:cxnSp>
-      <p:cxnSp>
-        <p:nvCxnSpPr>
-          <p:cNvPr id="84" name="직선 화살표 연결선 83">
-            <a:extLst>
-              <a:ext uri="{FF2B5EF4-FFF2-40B4-BE49-F238E27FC236}">
-                <a16:creationId xmlns:a16="http://schemas.microsoft.com/office/drawing/2014/main" id="{EFD6E923-C0B1-81FE-9FFB-9B04A0CAF09F}"/>
-              </a:ext>
-            </a:extLst>
-          </p:cNvPr>
-          <p:cNvCxnSpPr>
-            <a:cxnSpLocks/>
-          </p:cNvCxnSpPr>
-          <p:nvPr/>
-        </p:nvCxnSpPr>
-        <p:spPr>
-          <a:xfrm flipH="1">
-            <a:off x="8378890" y="3647329"/>
-            <a:ext cx="298792" cy="1335218"/>
-          </a:xfrm>
-          <a:prstGeom prst="straightConnector1">
-            <a:avLst/>
-          </a:prstGeom>
-          <a:ln w="38100">
-            <a:solidFill>
-              <a:srgbClr val="FF0000"/>
-            </a:solidFill>
-            <a:prstDash val="sysDash"/>
-            <a:tailEnd type="triangle"/>
-          </a:ln>
-        </p:spPr>
-        <p:style>
-          <a:lnRef idx="1">
-            <a:schemeClr val="accent1"/>
-          </a:lnRef>
-          <a:fillRef idx="0">
-            <a:schemeClr val="accent1"/>
-          </a:fillRef>
-          <a:effectRef idx="0">
-            <a:schemeClr val="accent1"/>
-          </a:effectRef>
-          <a:fontRef idx="minor">
-            <a:schemeClr val="tx1"/>
-          </a:fontRef>
-        </p:style>
-      </p:cxnSp>
       <p:pic>
         <p:nvPicPr>
           <p:cNvPr id="55" name="그림 54">
@@ -5386,7 +5251,7 @@
         </p:blipFill>
         <p:spPr>
           <a:xfrm>
-            <a:off x="6613581" y="1394146"/>
+            <a:off x="10564666" y="1997082"/>
             <a:ext cx="479839" cy="450870"/>
           </a:xfrm>
           <a:prstGeom prst="rect">
@@ -5417,321 +5282,6 @@
           <a:xfrm flipV="1">
             <a:off x="2027971" y="3788229"/>
             <a:ext cx="789874" cy="856214"/>
-          </a:xfrm>
-          <a:prstGeom prst="straightConnector1">
-            <a:avLst/>
-          </a:prstGeom>
-          <a:ln w="38100">
-            <a:solidFill>
-              <a:srgbClr val="FF0000"/>
-            </a:solidFill>
-            <a:prstDash val="sysDash"/>
-            <a:tailEnd type="triangle"/>
-          </a:ln>
-        </p:spPr>
-        <p:style>
-          <a:lnRef idx="1">
-            <a:schemeClr val="accent1"/>
-          </a:lnRef>
-          <a:fillRef idx="0">
-            <a:schemeClr val="accent1"/>
-          </a:fillRef>
-          <a:effectRef idx="0">
-            <a:schemeClr val="accent1"/>
-          </a:effectRef>
-          <a:fontRef idx="minor">
-            <a:schemeClr val="tx1"/>
-          </a:fontRef>
-        </p:style>
-      </p:cxnSp>
-      <p:cxnSp>
-        <p:nvCxnSpPr>
-          <p:cNvPr id="97" name="직선 화살표 연결선 96">
-            <a:extLst>
-              <a:ext uri="{FF2B5EF4-FFF2-40B4-BE49-F238E27FC236}">
-                <a16:creationId xmlns:a16="http://schemas.microsoft.com/office/drawing/2014/main" id="{C49126CC-81A3-E7E1-2F87-85E6A9DC364C}"/>
-              </a:ext>
-            </a:extLst>
-          </p:cNvPr>
-          <p:cNvCxnSpPr>
-            <a:cxnSpLocks/>
-          </p:cNvCxnSpPr>
-          <p:nvPr/>
-        </p:nvCxnSpPr>
-        <p:spPr>
-          <a:xfrm flipH="1">
-            <a:off x="7109927" y="6600613"/>
-            <a:ext cx="499308" cy="0"/>
-          </a:xfrm>
-          <a:prstGeom prst="straightConnector1">
-            <a:avLst/>
-          </a:prstGeom>
-          <a:ln w="38100">
-            <a:solidFill>
-              <a:srgbClr val="FF0000"/>
-            </a:solidFill>
-            <a:prstDash val="sysDash"/>
-            <a:tailEnd type="triangle"/>
-          </a:ln>
-        </p:spPr>
-        <p:style>
-          <a:lnRef idx="1">
-            <a:schemeClr val="accent1"/>
-          </a:lnRef>
-          <a:fillRef idx="0">
-            <a:schemeClr val="accent1"/>
-          </a:fillRef>
-          <a:effectRef idx="0">
-            <a:schemeClr val="accent1"/>
-          </a:effectRef>
-          <a:fontRef idx="minor">
-            <a:schemeClr val="tx1"/>
-          </a:fontRef>
-        </p:style>
-      </p:cxnSp>
-      <p:cxnSp>
-        <p:nvCxnSpPr>
-          <p:cNvPr id="102" name="직선 화살표 연결선 101">
-            <a:extLst>
-              <a:ext uri="{FF2B5EF4-FFF2-40B4-BE49-F238E27FC236}">
-                <a16:creationId xmlns:a16="http://schemas.microsoft.com/office/drawing/2014/main" id="{382E57B9-23E7-F74B-B01C-389BF0310B11}"/>
-              </a:ext>
-            </a:extLst>
-          </p:cNvPr>
-          <p:cNvCxnSpPr>
-            <a:cxnSpLocks/>
-          </p:cNvCxnSpPr>
-          <p:nvPr/>
-        </p:nvCxnSpPr>
-        <p:spPr>
-          <a:xfrm flipH="1">
-            <a:off x="5864410" y="6613053"/>
-            <a:ext cx="1226855" cy="0"/>
-          </a:xfrm>
-          <a:prstGeom prst="straightConnector1">
-            <a:avLst/>
-          </a:prstGeom>
-          <a:ln w="38100">
-            <a:solidFill>
-              <a:srgbClr val="FF0000"/>
-            </a:solidFill>
-            <a:prstDash val="sysDash"/>
-            <a:tailEnd type="triangle"/>
-          </a:ln>
-        </p:spPr>
-        <p:style>
-          <a:lnRef idx="1">
-            <a:schemeClr val="accent1"/>
-          </a:lnRef>
-          <a:fillRef idx="0">
-            <a:schemeClr val="accent1"/>
-          </a:fillRef>
-          <a:effectRef idx="0">
-            <a:schemeClr val="accent1"/>
-          </a:effectRef>
-          <a:fontRef idx="minor">
-            <a:schemeClr val="tx1"/>
-          </a:fontRef>
-        </p:style>
-      </p:cxnSp>
-      <p:cxnSp>
-        <p:nvCxnSpPr>
-          <p:cNvPr id="105" name="직선 화살표 연결선 104">
-            <a:extLst>
-              <a:ext uri="{FF2B5EF4-FFF2-40B4-BE49-F238E27FC236}">
-                <a16:creationId xmlns:a16="http://schemas.microsoft.com/office/drawing/2014/main" id="{93EF4623-DDDB-622C-8413-B0D0C55ABD88}"/>
-              </a:ext>
-            </a:extLst>
-          </p:cNvPr>
-          <p:cNvCxnSpPr>
-            <a:cxnSpLocks/>
-          </p:cNvCxnSpPr>
-          <p:nvPr/>
-        </p:nvCxnSpPr>
-        <p:spPr>
-          <a:xfrm flipV="1">
-            <a:off x="7080499" y="6008914"/>
-            <a:ext cx="0" cy="479730"/>
-          </a:xfrm>
-          <a:prstGeom prst="straightConnector1">
-            <a:avLst/>
-          </a:prstGeom>
-          <a:ln w="38100">
-            <a:solidFill>
-              <a:srgbClr val="FF0000"/>
-            </a:solidFill>
-            <a:prstDash val="sysDash"/>
-            <a:tailEnd type="triangle"/>
-          </a:ln>
-        </p:spPr>
-        <p:style>
-          <a:lnRef idx="1">
-            <a:schemeClr val="accent1"/>
-          </a:lnRef>
-          <a:fillRef idx="0">
-            <a:schemeClr val="accent1"/>
-          </a:fillRef>
-          <a:effectRef idx="0">
-            <a:schemeClr val="accent1"/>
-          </a:effectRef>
-          <a:fontRef idx="minor">
-            <a:schemeClr val="tx1"/>
-          </a:fontRef>
-        </p:style>
-      </p:cxnSp>
-      <p:cxnSp>
-        <p:nvCxnSpPr>
-          <p:cNvPr id="108" name="직선 화살표 연결선 107">
-            <a:extLst>
-              <a:ext uri="{FF2B5EF4-FFF2-40B4-BE49-F238E27FC236}">
-                <a16:creationId xmlns:a16="http://schemas.microsoft.com/office/drawing/2014/main" id="{63B5FBDA-1493-F090-76BF-C6468E831961}"/>
-              </a:ext>
-            </a:extLst>
-          </p:cNvPr>
-          <p:cNvCxnSpPr>
-            <a:cxnSpLocks/>
-          </p:cNvCxnSpPr>
-          <p:nvPr/>
-        </p:nvCxnSpPr>
-        <p:spPr>
-          <a:xfrm flipV="1">
-            <a:off x="5848239" y="5952931"/>
-            <a:ext cx="0" cy="669780"/>
-          </a:xfrm>
-          <a:prstGeom prst="straightConnector1">
-            <a:avLst/>
-          </a:prstGeom>
-          <a:ln w="38100">
-            <a:solidFill>
-              <a:srgbClr val="FF0000"/>
-            </a:solidFill>
-            <a:prstDash val="sysDash"/>
-            <a:tailEnd type="triangle"/>
-          </a:ln>
-        </p:spPr>
-        <p:style>
-          <a:lnRef idx="1">
-            <a:schemeClr val="accent1"/>
-          </a:lnRef>
-          <a:fillRef idx="0">
-            <a:schemeClr val="accent1"/>
-          </a:fillRef>
-          <a:effectRef idx="0">
-            <a:schemeClr val="accent1"/>
-          </a:effectRef>
-          <a:fontRef idx="minor">
-            <a:schemeClr val="tx1"/>
-          </a:fontRef>
-        </p:style>
-      </p:cxnSp>
-      <p:cxnSp>
-        <p:nvCxnSpPr>
-          <p:cNvPr id="109" name="직선 화살표 연결선 108">
-            <a:extLst>
-              <a:ext uri="{FF2B5EF4-FFF2-40B4-BE49-F238E27FC236}">
-                <a16:creationId xmlns:a16="http://schemas.microsoft.com/office/drawing/2014/main" id="{330D5FB5-5625-D9B6-E779-3F45EA4B4870}"/>
-              </a:ext>
-            </a:extLst>
-          </p:cNvPr>
-          <p:cNvCxnSpPr>
-            <a:cxnSpLocks/>
-          </p:cNvCxnSpPr>
-          <p:nvPr/>
-        </p:nvCxnSpPr>
-        <p:spPr>
-          <a:xfrm flipH="1">
-            <a:off x="4506686" y="6597502"/>
-            <a:ext cx="1289300" cy="0"/>
-          </a:xfrm>
-          <a:prstGeom prst="straightConnector1">
-            <a:avLst/>
-          </a:prstGeom>
-          <a:ln w="38100">
-            <a:solidFill>
-              <a:srgbClr val="FF0000"/>
-            </a:solidFill>
-            <a:prstDash val="sysDash"/>
-            <a:tailEnd type="triangle"/>
-          </a:ln>
-        </p:spPr>
-        <p:style>
-          <a:lnRef idx="1">
-            <a:schemeClr val="accent1"/>
-          </a:lnRef>
-          <a:fillRef idx="0">
-            <a:schemeClr val="accent1"/>
-          </a:fillRef>
-          <a:effectRef idx="0">
-            <a:schemeClr val="accent1"/>
-          </a:effectRef>
-          <a:fontRef idx="minor">
-            <a:schemeClr val="tx1"/>
-          </a:fontRef>
-        </p:style>
-      </p:cxnSp>
-      <p:cxnSp>
-        <p:nvCxnSpPr>
-          <p:cNvPr id="83" name="직선 화살표 연결선 82">
-            <a:extLst>
-              <a:ext uri="{FF2B5EF4-FFF2-40B4-BE49-F238E27FC236}">
-                <a16:creationId xmlns:a16="http://schemas.microsoft.com/office/drawing/2014/main" id="{A3682802-63B2-B60C-4C98-6019E5F4C2F4}"/>
-              </a:ext>
-            </a:extLst>
-          </p:cNvPr>
-          <p:cNvCxnSpPr>
-            <a:cxnSpLocks/>
-          </p:cNvCxnSpPr>
-          <p:nvPr/>
-        </p:nvCxnSpPr>
-        <p:spPr>
-          <a:xfrm flipH="1">
-            <a:off x="7681864" y="4766573"/>
-            <a:ext cx="608504" cy="0"/>
-          </a:xfrm>
-          <a:prstGeom prst="straightConnector1">
-            <a:avLst/>
-          </a:prstGeom>
-          <a:ln w="38100">
-            <a:solidFill>
-              <a:srgbClr val="FF0000"/>
-            </a:solidFill>
-            <a:prstDash val="sysDash"/>
-            <a:tailEnd type="triangle"/>
-          </a:ln>
-        </p:spPr>
-        <p:style>
-          <a:lnRef idx="1">
-            <a:schemeClr val="accent1"/>
-          </a:lnRef>
-          <a:fillRef idx="0">
-            <a:schemeClr val="accent1"/>
-          </a:fillRef>
-          <a:effectRef idx="0">
-            <a:schemeClr val="accent1"/>
-          </a:effectRef>
-          <a:fontRef idx="minor">
-            <a:schemeClr val="tx1"/>
-          </a:fontRef>
-        </p:style>
-      </p:cxnSp>
-      <p:cxnSp>
-        <p:nvCxnSpPr>
-          <p:cNvPr id="21" name="직선 화살표 연결선 20">
-            <a:extLst>
-              <a:ext uri="{FF2B5EF4-FFF2-40B4-BE49-F238E27FC236}">
-                <a16:creationId xmlns:a16="http://schemas.microsoft.com/office/drawing/2014/main" id="{5DBE20AD-288E-2AC8-8CF4-3E8F531AB0DA}"/>
-              </a:ext>
-            </a:extLst>
-          </p:cNvPr>
-          <p:cNvCxnSpPr>
-            <a:cxnSpLocks/>
-          </p:cNvCxnSpPr>
-          <p:nvPr/>
-        </p:nvCxnSpPr>
-        <p:spPr>
-          <a:xfrm flipH="1">
-            <a:off x="8089641" y="5033068"/>
-            <a:ext cx="284703" cy="938524"/>
           </a:xfrm>
           <a:prstGeom prst="straightConnector1">
             <a:avLst/>
@@ -5886,51 +5436,6 @@
           </a:fontRef>
         </p:style>
       </p:cxnSp>
-      <p:cxnSp>
-        <p:nvCxnSpPr>
-          <p:cNvPr id="89" name="직선 화살표 연결선 88">
-            <a:extLst>
-              <a:ext uri="{FF2B5EF4-FFF2-40B4-BE49-F238E27FC236}">
-                <a16:creationId xmlns:a16="http://schemas.microsoft.com/office/drawing/2014/main" id="{EAB10F53-8825-F35E-1A2A-98F0E98FDE4F}"/>
-              </a:ext>
-            </a:extLst>
-          </p:cNvPr>
-          <p:cNvCxnSpPr>
-            <a:cxnSpLocks/>
-          </p:cNvCxnSpPr>
-          <p:nvPr/>
-        </p:nvCxnSpPr>
-        <p:spPr>
-          <a:xfrm flipH="1">
-            <a:off x="8294914" y="2861029"/>
-            <a:ext cx="146300" cy="451338"/>
-          </a:xfrm>
-          <a:prstGeom prst="straightConnector1">
-            <a:avLst/>
-          </a:prstGeom>
-          <a:ln w="38100">
-            <a:solidFill>
-              <a:srgbClr val="FF0000"/>
-            </a:solidFill>
-            <a:prstDash val="sysDash"/>
-            <a:tailEnd type="triangle"/>
-          </a:ln>
-        </p:spPr>
-        <p:style>
-          <a:lnRef idx="1">
-            <a:schemeClr val="accent1"/>
-          </a:lnRef>
-          <a:fillRef idx="0">
-            <a:schemeClr val="accent1"/>
-          </a:fillRef>
-          <a:effectRef idx="0">
-            <a:schemeClr val="accent1"/>
-          </a:effectRef>
-          <a:fontRef idx="minor">
-            <a:schemeClr val="tx1"/>
-          </a:fontRef>
-        </p:style>
-      </p:cxnSp>
       <p:pic>
         <p:nvPicPr>
           <p:cNvPr id="71" name="그림 70">
@@ -5972,141 +5477,657 @@
           </a:ln>
         </p:spPr>
       </p:pic>
-      <p:cxnSp>
-        <p:nvCxnSpPr>
-          <p:cNvPr id="81" name="직선 화살표 연결선 80">
+      <p:grpSp>
+        <p:nvGrpSpPr>
+          <p:cNvPr id="6" name="그룹 5">
             <a:extLst>
               <a:ext uri="{FF2B5EF4-FFF2-40B4-BE49-F238E27FC236}">
-                <a16:creationId xmlns:a16="http://schemas.microsoft.com/office/drawing/2014/main" id="{F8DDDF3B-36BD-7A1F-5D78-2D4A2AABC13F}"/>
+                <a16:creationId xmlns:a16="http://schemas.microsoft.com/office/drawing/2014/main" id="{31151267-C9AD-DC2D-304A-C9F0FD35831D}"/>
               </a:ext>
             </a:extLst>
           </p:cNvPr>
-          <p:cNvCxnSpPr>
-            <a:cxnSpLocks/>
-          </p:cNvCxnSpPr>
+          <p:cNvGrpSpPr/>
           <p:nvPr/>
-        </p:nvCxnSpPr>
-        <p:spPr>
+        </p:nvGrpSpPr>
+        <p:grpSpPr>
           <a:xfrm>
-            <a:off x="8537750" y="3578290"/>
-            <a:ext cx="233026" cy="0"/>
+            <a:off x="4159178" y="1997082"/>
+            <a:ext cx="4050770" cy="4039428"/>
+            <a:chOff x="4506686" y="2174508"/>
+            <a:chExt cx="4272217" cy="4450227"/>
           </a:xfrm>
-          <a:prstGeom prst="straightConnector1">
-            <a:avLst/>
-          </a:prstGeom>
-          <a:ln w="38100">
-            <a:solidFill>
-              <a:srgbClr val="FF0000"/>
-            </a:solidFill>
-            <a:prstDash val="sysDash"/>
-            <a:tailEnd type="triangle"/>
-          </a:ln>
-        </p:spPr>
-        <p:style>
-          <a:lnRef idx="1">
-            <a:schemeClr val="accent1"/>
-          </a:lnRef>
-          <a:fillRef idx="0">
-            <a:schemeClr val="accent1"/>
-          </a:fillRef>
-          <a:effectRef idx="0">
-            <a:schemeClr val="accent1"/>
-          </a:effectRef>
-          <a:fontRef idx="minor">
-            <a:schemeClr val="tx1"/>
-          </a:fontRef>
-        </p:style>
-      </p:cxnSp>
-      <p:cxnSp>
-        <p:nvCxnSpPr>
-          <p:cNvPr id="91" name="직선 화살표 연결선 90">
-            <a:extLst>
-              <a:ext uri="{FF2B5EF4-FFF2-40B4-BE49-F238E27FC236}">
-                <a16:creationId xmlns:a16="http://schemas.microsoft.com/office/drawing/2014/main" id="{8CF2A270-F114-D9F4-1B5B-1B4341CFA586}"/>
-              </a:ext>
-            </a:extLst>
-          </p:cNvPr>
-          <p:cNvCxnSpPr>
-            <a:cxnSpLocks/>
-          </p:cNvCxnSpPr>
-          <p:nvPr/>
-        </p:nvCxnSpPr>
-        <p:spPr>
-          <a:xfrm flipH="1">
-            <a:off x="7600999" y="3276785"/>
-            <a:ext cx="608504" cy="0"/>
-          </a:xfrm>
-          <a:prstGeom prst="straightConnector1">
-            <a:avLst/>
-          </a:prstGeom>
-          <a:ln w="38100">
-            <a:solidFill>
-              <a:srgbClr val="FF0000"/>
-            </a:solidFill>
-            <a:prstDash val="sysDash"/>
-            <a:tailEnd type="triangle"/>
-          </a:ln>
-        </p:spPr>
-        <p:style>
-          <a:lnRef idx="1">
-            <a:schemeClr val="accent1"/>
-          </a:lnRef>
-          <a:fillRef idx="0">
-            <a:schemeClr val="accent1"/>
-          </a:fillRef>
-          <a:effectRef idx="0">
-            <a:schemeClr val="accent1"/>
-          </a:effectRef>
-          <a:fontRef idx="minor">
-            <a:schemeClr val="tx1"/>
-          </a:fontRef>
-        </p:style>
-      </p:cxnSp>
-      <p:cxnSp>
-        <p:nvCxnSpPr>
-          <p:cNvPr id="96" name="직선 화살표 연결선 95">
-            <a:extLst>
-              <a:ext uri="{FF2B5EF4-FFF2-40B4-BE49-F238E27FC236}">
-                <a16:creationId xmlns:a16="http://schemas.microsoft.com/office/drawing/2014/main" id="{05336049-416E-025B-3598-526F70EC2F54}"/>
-              </a:ext>
-            </a:extLst>
-          </p:cNvPr>
-          <p:cNvCxnSpPr>
-            <a:cxnSpLocks/>
-          </p:cNvCxnSpPr>
-          <p:nvPr/>
-        </p:nvCxnSpPr>
-        <p:spPr>
-          <a:xfrm flipH="1">
-            <a:off x="7679094" y="5969240"/>
-            <a:ext cx="381118" cy="655495"/>
-          </a:xfrm>
-          <a:prstGeom prst="straightConnector1">
-            <a:avLst/>
-          </a:prstGeom>
-          <a:ln w="38100">
-            <a:solidFill>
-              <a:srgbClr val="FF0000"/>
-            </a:solidFill>
-            <a:prstDash val="sysDash"/>
-            <a:tailEnd type="triangle"/>
-          </a:ln>
-        </p:spPr>
-        <p:style>
-          <a:lnRef idx="1">
-            <a:schemeClr val="accent1"/>
-          </a:lnRef>
-          <a:fillRef idx="0">
-            <a:schemeClr val="accent1"/>
-          </a:fillRef>
-          <a:effectRef idx="0">
-            <a:schemeClr val="accent1"/>
-          </a:effectRef>
-          <a:fontRef idx="minor">
-            <a:schemeClr val="tx1"/>
-          </a:fontRef>
-        </p:style>
-      </p:cxnSp>
+        </p:grpSpPr>
+        <p:cxnSp>
+          <p:nvCxnSpPr>
+            <p:cNvPr id="76" name="직선 화살표 연결선 75">
+              <a:extLst>
+                <a:ext uri="{FF2B5EF4-FFF2-40B4-BE49-F238E27FC236}">
+                  <a16:creationId xmlns:a16="http://schemas.microsoft.com/office/drawing/2014/main" id="{8B4E25FE-3E67-0474-509B-ACED8285ADA0}"/>
+                </a:ext>
+              </a:extLst>
+            </p:cNvPr>
+            <p:cNvCxnSpPr>
+              <a:cxnSpLocks/>
+            </p:cNvCxnSpPr>
+            <p:nvPr/>
+          </p:nvCxnSpPr>
+          <p:spPr>
+            <a:xfrm flipH="1">
+              <a:off x="8457506" y="2174508"/>
+              <a:ext cx="321397" cy="658972"/>
+            </a:xfrm>
+            <a:prstGeom prst="straightConnector1">
+              <a:avLst/>
+            </a:prstGeom>
+            <a:ln w="38100">
+              <a:solidFill>
+                <a:srgbClr val="FF0000"/>
+              </a:solidFill>
+              <a:prstDash val="sysDash"/>
+              <a:tailEnd type="triangle"/>
+            </a:ln>
+          </p:spPr>
+          <p:style>
+            <a:lnRef idx="1">
+              <a:schemeClr val="accent1"/>
+            </a:lnRef>
+            <a:fillRef idx="0">
+              <a:schemeClr val="accent1"/>
+            </a:fillRef>
+            <a:effectRef idx="0">
+              <a:schemeClr val="accent1"/>
+            </a:effectRef>
+            <a:fontRef idx="minor">
+              <a:schemeClr val="tx1"/>
+            </a:fontRef>
+          </p:style>
+        </p:cxnSp>
+        <p:cxnSp>
+          <p:nvCxnSpPr>
+            <p:cNvPr id="64" name="직선 화살표 연결선 63">
+              <a:extLst>
+                <a:ext uri="{FF2B5EF4-FFF2-40B4-BE49-F238E27FC236}">
+                  <a16:creationId xmlns:a16="http://schemas.microsoft.com/office/drawing/2014/main" id="{22372A38-A96D-3FC5-D5E6-627E89B7F9B8}"/>
+                </a:ext>
+              </a:extLst>
+            </p:cNvPr>
+            <p:cNvCxnSpPr>
+              <a:cxnSpLocks/>
+            </p:cNvCxnSpPr>
+            <p:nvPr/>
+          </p:nvCxnSpPr>
+          <p:spPr>
+            <a:xfrm>
+              <a:off x="8348027" y="3323253"/>
+              <a:ext cx="142830" cy="315686"/>
+            </a:xfrm>
+            <a:prstGeom prst="straightConnector1">
+              <a:avLst/>
+            </a:prstGeom>
+            <a:ln w="38100">
+              <a:solidFill>
+                <a:srgbClr val="FF0000"/>
+              </a:solidFill>
+              <a:prstDash val="sysDash"/>
+              <a:tailEnd type="triangle"/>
+            </a:ln>
+          </p:spPr>
+          <p:style>
+            <a:lnRef idx="1">
+              <a:schemeClr val="accent1"/>
+            </a:lnRef>
+            <a:fillRef idx="0">
+              <a:schemeClr val="accent1"/>
+            </a:fillRef>
+            <a:effectRef idx="0">
+              <a:schemeClr val="accent1"/>
+            </a:effectRef>
+            <a:fontRef idx="minor">
+              <a:schemeClr val="tx1"/>
+            </a:fontRef>
+          </p:style>
+        </p:cxnSp>
+        <p:cxnSp>
+          <p:nvCxnSpPr>
+            <p:cNvPr id="84" name="직선 화살표 연결선 83">
+              <a:extLst>
+                <a:ext uri="{FF2B5EF4-FFF2-40B4-BE49-F238E27FC236}">
+                  <a16:creationId xmlns:a16="http://schemas.microsoft.com/office/drawing/2014/main" id="{EFD6E923-C0B1-81FE-9FFB-9B04A0CAF09F}"/>
+                </a:ext>
+              </a:extLst>
+            </p:cNvPr>
+            <p:cNvCxnSpPr>
+              <a:cxnSpLocks/>
+            </p:cNvCxnSpPr>
+            <p:nvPr/>
+          </p:nvCxnSpPr>
+          <p:spPr>
+            <a:xfrm flipH="1">
+              <a:off x="8378890" y="3647329"/>
+              <a:ext cx="298792" cy="1335218"/>
+            </a:xfrm>
+            <a:prstGeom prst="straightConnector1">
+              <a:avLst/>
+            </a:prstGeom>
+            <a:ln w="38100">
+              <a:solidFill>
+                <a:srgbClr val="FF0000"/>
+              </a:solidFill>
+              <a:prstDash val="sysDash"/>
+              <a:tailEnd type="triangle"/>
+            </a:ln>
+          </p:spPr>
+          <p:style>
+            <a:lnRef idx="1">
+              <a:schemeClr val="accent1"/>
+            </a:lnRef>
+            <a:fillRef idx="0">
+              <a:schemeClr val="accent1"/>
+            </a:fillRef>
+            <a:effectRef idx="0">
+              <a:schemeClr val="accent1"/>
+            </a:effectRef>
+            <a:fontRef idx="minor">
+              <a:schemeClr val="tx1"/>
+            </a:fontRef>
+          </p:style>
+        </p:cxnSp>
+        <p:cxnSp>
+          <p:nvCxnSpPr>
+            <p:cNvPr id="97" name="직선 화살표 연결선 96">
+              <a:extLst>
+                <a:ext uri="{FF2B5EF4-FFF2-40B4-BE49-F238E27FC236}">
+                  <a16:creationId xmlns:a16="http://schemas.microsoft.com/office/drawing/2014/main" id="{C49126CC-81A3-E7E1-2F87-85E6A9DC364C}"/>
+                </a:ext>
+              </a:extLst>
+            </p:cNvPr>
+            <p:cNvCxnSpPr>
+              <a:cxnSpLocks/>
+            </p:cNvCxnSpPr>
+            <p:nvPr/>
+          </p:nvCxnSpPr>
+          <p:spPr>
+            <a:xfrm flipH="1">
+              <a:off x="7109927" y="6600613"/>
+              <a:ext cx="499308" cy="0"/>
+            </a:xfrm>
+            <a:prstGeom prst="straightConnector1">
+              <a:avLst/>
+            </a:prstGeom>
+            <a:ln w="38100">
+              <a:solidFill>
+                <a:srgbClr val="FF0000"/>
+              </a:solidFill>
+              <a:prstDash val="sysDash"/>
+              <a:tailEnd type="triangle"/>
+            </a:ln>
+          </p:spPr>
+          <p:style>
+            <a:lnRef idx="1">
+              <a:schemeClr val="accent1"/>
+            </a:lnRef>
+            <a:fillRef idx="0">
+              <a:schemeClr val="accent1"/>
+            </a:fillRef>
+            <a:effectRef idx="0">
+              <a:schemeClr val="accent1"/>
+            </a:effectRef>
+            <a:fontRef idx="minor">
+              <a:schemeClr val="tx1"/>
+            </a:fontRef>
+          </p:style>
+        </p:cxnSp>
+        <p:cxnSp>
+          <p:nvCxnSpPr>
+            <p:cNvPr id="102" name="직선 화살표 연결선 101">
+              <a:extLst>
+                <a:ext uri="{FF2B5EF4-FFF2-40B4-BE49-F238E27FC236}">
+                  <a16:creationId xmlns:a16="http://schemas.microsoft.com/office/drawing/2014/main" id="{382E57B9-23E7-F74B-B01C-389BF0310B11}"/>
+                </a:ext>
+              </a:extLst>
+            </p:cNvPr>
+            <p:cNvCxnSpPr>
+              <a:cxnSpLocks/>
+            </p:cNvCxnSpPr>
+            <p:nvPr/>
+          </p:nvCxnSpPr>
+          <p:spPr>
+            <a:xfrm flipH="1">
+              <a:off x="5864410" y="6613053"/>
+              <a:ext cx="1226855" cy="0"/>
+            </a:xfrm>
+            <a:prstGeom prst="straightConnector1">
+              <a:avLst/>
+            </a:prstGeom>
+            <a:ln w="38100">
+              <a:solidFill>
+                <a:srgbClr val="FF0000"/>
+              </a:solidFill>
+              <a:prstDash val="sysDash"/>
+              <a:tailEnd type="triangle"/>
+            </a:ln>
+          </p:spPr>
+          <p:style>
+            <a:lnRef idx="1">
+              <a:schemeClr val="accent1"/>
+            </a:lnRef>
+            <a:fillRef idx="0">
+              <a:schemeClr val="accent1"/>
+            </a:fillRef>
+            <a:effectRef idx="0">
+              <a:schemeClr val="accent1"/>
+            </a:effectRef>
+            <a:fontRef idx="minor">
+              <a:schemeClr val="tx1"/>
+            </a:fontRef>
+          </p:style>
+        </p:cxnSp>
+        <p:cxnSp>
+          <p:nvCxnSpPr>
+            <p:cNvPr id="105" name="직선 화살표 연결선 104">
+              <a:extLst>
+                <a:ext uri="{FF2B5EF4-FFF2-40B4-BE49-F238E27FC236}">
+                  <a16:creationId xmlns:a16="http://schemas.microsoft.com/office/drawing/2014/main" id="{93EF4623-DDDB-622C-8413-B0D0C55ABD88}"/>
+                </a:ext>
+              </a:extLst>
+            </p:cNvPr>
+            <p:cNvCxnSpPr>
+              <a:cxnSpLocks/>
+            </p:cNvCxnSpPr>
+            <p:nvPr/>
+          </p:nvCxnSpPr>
+          <p:spPr>
+            <a:xfrm flipV="1">
+              <a:off x="7080499" y="6008914"/>
+              <a:ext cx="0" cy="479730"/>
+            </a:xfrm>
+            <a:prstGeom prst="straightConnector1">
+              <a:avLst/>
+            </a:prstGeom>
+            <a:ln w="38100">
+              <a:solidFill>
+                <a:srgbClr val="FF0000"/>
+              </a:solidFill>
+              <a:prstDash val="sysDash"/>
+              <a:tailEnd type="triangle"/>
+            </a:ln>
+          </p:spPr>
+          <p:style>
+            <a:lnRef idx="1">
+              <a:schemeClr val="accent1"/>
+            </a:lnRef>
+            <a:fillRef idx="0">
+              <a:schemeClr val="accent1"/>
+            </a:fillRef>
+            <a:effectRef idx="0">
+              <a:schemeClr val="accent1"/>
+            </a:effectRef>
+            <a:fontRef idx="minor">
+              <a:schemeClr val="tx1"/>
+            </a:fontRef>
+          </p:style>
+        </p:cxnSp>
+        <p:cxnSp>
+          <p:nvCxnSpPr>
+            <p:cNvPr id="108" name="직선 화살표 연결선 107">
+              <a:extLst>
+                <a:ext uri="{FF2B5EF4-FFF2-40B4-BE49-F238E27FC236}">
+                  <a16:creationId xmlns:a16="http://schemas.microsoft.com/office/drawing/2014/main" id="{63B5FBDA-1493-F090-76BF-C6468E831961}"/>
+                </a:ext>
+              </a:extLst>
+            </p:cNvPr>
+            <p:cNvCxnSpPr>
+              <a:cxnSpLocks/>
+            </p:cNvCxnSpPr>
+            <p:nvPr/>
+          </p:nvCxnSpPr>
+          <p:spPr>
+            <a:xfrm flipV="1">
+              <a:off x="5848239" y="5952931"/>
+              <a:ext cx="0" cy="669780"/>
+            </a:xfrm>
+            <a:prstGeom prst="straightConnector1">
+              <a:avLst/>
+            </a:prstGeom>
+            <a:ln w="38100">
+              <a:solidFill>
+                <a:srgbClr val="FF0000"/>
+              </a:solidFill>
+              <a:prstDash val="sysDash"/>
+              <a:tailEnd type="triangle"/>
+            </a:ln>
+          </p:spPr>
+          <p:style>
+            <a:lnRef idx="1">
+              <a:schemeClr val="accent1"/>
+            </a:lnRef>
+            <a:fillRef idx="0">
+              <a:schemeClr val="accent1"/>
+            </a:fillRef>
+            <a:effectRef idx="0">
+              <a:schemeClr val="accent1"/>
+            </a:effectRef>
+            <a:fontRef idx="minor">
+              <a:schemeClr val="tx1"/>
+            </a:fontRef>
+          </p:style>
+        </p:cxnSp>
+        <p:cxnSp>
+          <p:nvCxnSpPr>
+            <p:cNvPr id="109" name="직선 화살표 연결선 108">
+              <a:extLst>
+                <a:ext uri="{FF2B5EF4-FFF2-40B4-BE49-F238E27FC236}">
+                  <a16:creationId xmlns:a16="http://schemas.microsoft.com/office/drawing/2014/main" id="{330D5FB5-5625-D9B6-E779-3F45EA4B4870}"/>
+                </a:ext>
+              </a:extLst>
+            </p:cNvPr>
+            <p:cNvCxnSpPr>
+              <a:cxnSpLocks/>
+            </p:cNvCxnSpPr>
+            <p:nvPr/>
+          </p:nvCxnSpPr>
+          <p:spPr>
+            <a:xfrm flipH="1">
+              <a:off x="4506686" y="6597502"/>
+              <a:ext cx="1289300" cy="0"/>
+            </a:xfrm>
+            <a:prstGeom prst="straightConnector1">
+              <a:avLst/>
+            </a:prstGeom>
+            <a:ln w="38100">
+              <a:solidFill>
+                <a:srgbClr val="FF0000"/>
+              </a:solidFill>
+              <a:prstDash val="sysDash"/>
+              <a:tailEnd type="triangle"/>
+            </a:ln>
+          </p:spPr>
+          <p:style>
+            <a:lnRef idx="1">
+              <a:schemeClr val="accent1"/>
+            </a:lnRef>
+            <a:fillRef idx="0">
+              <a:schemeClr val="accent1"/>
+            </a:fillRef>
+            <a:effectRef idx="0">
+              <a:schemeClr val="accent1"/>
+            </a:effectRef>
+            <a:fontRef idx="minor">
+              <a:schemeClr val="tx1"/>
+            </a:fontRef>
+          </p:style>
+        </p:cxnSp>
+        <p:cxnSp>
+          <p:nvCxnSpPr>
+            <p:cNvPr id="83" name="직선 화살표 연결선 82">
+              <a:extLst>
+                <a:ext uri="{FF2B5EF4-FFF2-40B4-BE49-F238E27FC236}">
+                  <a16:creationId xmlns:a16="http://schemas.microsoft.com/office/drawing/2014/main" id="{A3682802-63B2-B60C-4C98-6019E5F4C2F4}"/>
+                </a:ext>
+              </a:extLst>
+            </p:cNvPr>
+            <p:cNvCxnSpPr>
+              <a:cxnSpLocks/>
+            </p:cNvCxnSpPr>
+            <p:nvPr/>
+          </p:nvCxnSpPr>
+          <p:spPr>
+            <a:xfrm flipH="1">
+              <a:off x="7681864" y="4766573"/>
+              <a:ext cx="608504" cy="0"/>
+            </a:xfrm>
+            <a:prstGeom prst="straightConnector1">
+              <a:avLst/>
+            </a:prstGeom>
+            <a:ln w="38100">
+              <a:solidFill>
+                <a:srgbClr val="FF0000"/>
+              </a:solidFill>
+              <a:prstDash val="sysDash"/>
+              <a:tailEnd type="triangle"/>
+            </a:ln>
+          </p:spPr>
+          <p:style>
+            <a:lnRef idx="1">
+              <a:schemeClr val="accent1"/>
+            </a:lnRef>
+            <a:fillRef idx="0">
+              <a:schemeClr val="accent1"/>
+            </a:fillRef>
+            <a:effectRef idx="0">
+              <a:schemeClr val="accent1"/>
+            </a:effectRef>
+            <a:fontRef idx="minor">
+              <a:schemeClr val="tx1"/>
+            </a:fontRef>
+          </p:style>
+        </p:cxnSp>
+        <p:cxnSp>
+          <p:nvCxnSpPr>
+            <p:cNvPr id="21" name="직선 화살표 연결선 20">
+              <a:extLst>
+                <a:ext uri="{FF2B5EF4-FFF2-40B4-BE49-F238E27FC236}">
+                  <a16:creationId xmlns:a16="http://schemas.microsoft.com/office/drawing/2014/main" id="{5DBE20AD-288E-2AC8-8CF4-3E8F531AB0DA}"/>
+                </a:ext>
+              </a:extLst>
+            </p:cNvPr>
+            <p:cNvCxnSpPr>
+              <a:cxnSpLocks/>
+            </p:cNvCxnSpPr>
+            <p:nvPr/>
+          </p:nvCxnSpPr>
+          <p:spPr>
+            <a:xfrm flipH="1">
+              <a:off x="8089641" y="5033068"/>
+              <a:ext cx="284703" cy="938524"/>
+            </a:xfrm>
+            <a:prstGeom prst="straightConnector1">
+              <a:avLst/>
+            </a:prstGeom>
+            <a:ln w="38100">
+              <a:solidFill>
+                <a:srgbClr val="FF0000"/>
+              </a:solidFill>
+              <a:prstDash val="sysDash"/>
+              <a:tailEnd type="triangle"/>
+            </a:ln>
+          </p:spPr>
+          <p:style>
+            <a:lnRef idx="1">
+              <a:schemeClr val="accent1"/>
+            </a:lnRef>
+            <a:fillRef idx="0">
+              <a:schemeClr val="accent1"/>
+            </a:fillRef>
+            <a:effectRef idx="0">
+              <a:schemeClr val="accent1"/>
+            </a:effectRef>
+            <a:fontRef idx="minor">
+              <a:schemeClr val="tx1"/>
+            </a:fontRef>
+          </p:style>
+        </p:cxnSp>
+        <p:cxnSp>
+          <p:nvCxnSpPr>
+            <p:cNvPr id="89" name="직선 화살표 연결선 88">
+              <a:extLst>
+                <a:ext uri="{FF2B5EF4-FFF2-40B4-BE49-F238E27FC236}">
+                  <a16:creationId xmlns:a16="http://schemas.microsoft.com/office/drawing/2014/main" id="{EAB10F53-8825-F35E-1A2A-98F0E98FDE4F}"/>
+                </a:ext>
+              </a:extLst>
+            </p:cNvPr>
+            <p:cNvCxnSpPr>
+              <a:cxnSpLocks/>
+            </p:cNvCxnSpPr>
+            <p:nvPr/>
+          </p:nvCxnSpPr>
+          <p:spPr>
+            <a:xfrm flipH="1">
+              <a:off x="8294914" y="2861029"/>
+              <a:ext cx="146300" cy="451338"/>
+            </a:xfrm>
+            <a:prstGeom prst="straightConnector1">
+              <a:avLst/>
+            </a:prstGeom>
+            <a:ln w="38100">
+              <a:solidFill>
+                <a:srgbClr val="FF0000"/>
+              </a:solidFill>
+              <a:prstDash val="sysDash"/>
+              <a:tailEnd type="triangle"/>
+            </a:ln>
+          </p:spPr>
+          <p:style>
+            <a:lnRef idx="1">
+              <a:schemeClr val="accent1"/>
+            </a:lnRef>
+            <a:fillRef idx="0">
+              <a:schemeClr val="accent1"/>
+            </a:fillRef>
+            <a:effectRef idx="0">
+              <a:schemeClr val="accent1"/>
+            </a:effectRef>
+            <a:fontRef idx="minor">
+              <a:schemeClr val="tx1"/>
+            </a:fontRef>
+          </p:style>
+        </p:cxnSp>
+        <p:cxnSp>
+          <p:nvCxnSpPr>
+            <p:cNvPr id="81" name="직선 화살표 연결선 80">
+              <a:extLst>
+                <a:ext uri="{FF2B5EF4-FFF2-40B4-BE49-F238E27FC236}">
+                  <a16:creationId xmlns:a16="http://schemas.microsoft.com/office/drawing/2014/main" id="{F8DDDF3B-36BD-7A1F-5D78-2D4A2AABC13F}"/>
+                </a:ext>
+              </a:extLst>
+            </p:cNvPr>
+            <p:cNvCxnSpPr>
+              <a:cxnSpLocks/>
+            </p:cNvCxnSpPr>
+            <p:nvPr/>
+          </p:nvCxnSpPr>
+          <p:spPr>
+            <a:xfrm>
+              <a:off x="8537750" y="3578290"/>
+              <a:ext cx="233026" cy="0"/>
+            </a:xfrm>
+            <a:prstGeom prst="straightConnector1">
+              <a:avLst/>
+            </a:prstGeom>
+            <a:ln w="38100">
+              <a:solidFill>
+                <a:srgbClr val="FF0000"/>
+              </a:solidFill>
+              <a:prstDash val="sysDash"/>
+              <a:tailEnd type="triangle"/>
+            </a:ln>
+          </p:spPr>
+          <p:style>
+            <a:lnRef idx="1">
+              <a:schemeClr val="accent1"/>
+            </a:lnRef>
+            <a:fillRef idx="0">
+              <a:schemeClr val="accent1"/>
+            </a:fillRef>
+            <a:effectRef idx="0">
+              <a:schemeClr val="accent1"/>
+            </a:effectRef>
+            <a:fontRef idx="minor">
+              <a:schemeClr val="tx1"/>
+            </a:fontRef>
+          </p:style>
+        </p:cxnSp>
+        <p:cxnSp>
+          <p:nvCxnSpPr>
+            <p:cNvPr id="91" name="직선 화살표 연결선 90">
+              <a:extLst>
+                <a:ext uri="{FF2B5EF4-FFF2-40B4-BE49-F238E27FC236}">
+                  <a16:creationId xmlns:a16="http://schemas.microsoft.com/office/drawing/2014/main" id="{8CF2A270-F114-D9F4-1B5B-1B4341CFA586}"/>
+                </a:ext>
+              </a:extLst>
+            </p:cNvPr>
+            <p:cNvCxnSpPr>
+              <a:cxnSpLocks/>
+            </p:cNvCxnSpPr>
+            <p:nvPr/>
+          </p:nvCxnSpPr>
+          <p:spPr>
+            <a:xfrm flipH="1">
+              <a:off x="7600999" y="3276785"/>
+              <a:ext cx="608504" cy="0"/>
+            </a:xfrm>
+            <a:prstGeom prst="straightConnector1">
+              <a:avLst/>
+            </a:prstGeom>
+            <a:ln w="38100">
+              <a:solidFill>
+                <a:srgbClr val="FF0000"/>
+              </a:solidFill>
+              <a:prstDash val="sysDash"/>
+              <a:tailEnd type="triangle"/>
+            </a:ln>
+          </p:spPr>
+          <p:style>
+            <a:lnRef idx="1">
+              <a:schemeClr val="accent1"/>
+            </a:lnRef>
+            <a:fillRef idx="0">
+              <a:schemeClr val="accent1"/>
+            </a:fillRef>
+            <a:effectRef idx="0">
+              <a:schemeClr val="accent1"/>
+            </a:effectRef>
+            <a:fontRef idx="minor">
+              <a:schemeClr val="tx1"/>
+            </a:fontRef>
+          </p:style>
+        </p:cxnSp>
+        <p:cxnSp>
+          <p:nvCxnSpPr>
+            <p:cNvPr id="96" name="직선 화살표 연결선 95">
+              <a:extLst>
+                <a:ext uri="{FF2B5EF4-FFF2-40B4-BE49-F238E27FC236}">
+                  <a16:creationId xmlns:a16="http://schemas.microsoft.com/office/drawing/2014/main" id="{05336049-416E-025B-3598-526F70EC2F54}"/>
+                </a:ext>
+              </a:extLst>
+            </p:cNvPr>
+            <p:cNvCxnSpPr>
+              <a:cxnSpLocks/>
+            </p:cNvCxnSpPr>
+            <p:nvPr/>
+          </p:nvCxnSpPr>
+          <p:spPr>
+            <a:xfrm flipH="1">
+              <a:off x="7679094" y="5969240"/>
+              <a:ext cx="381118" cy="655495"/>
+            </a:xfrm>
+            <a:prstGeom prst="straightConnector1">
+              <a:avLst/>
+            </a:prstGeom>
+            <a:ln w="38100">
+              <a:solidFill>
+                <a:srgbClr val="FF0000"/>
+              </a:solidFill>
+              <a:prstDash val="sysDash"/>
+              <a:tailEnd type="triangle"/>
+            </a:ln>
+          </p:spPr>
+          <p:style>
+            <a:lnRef idx="1">
+              <a:schemeClr val="accent1"/>
+            </a:lnRef>
+            <a:fillRef idx="0">
+              <a:schemeClr val="accent1"/>
+            </a:fillRef>
+            <a:effectRef idx="0">
+              <a:schemeClr val="accent1"/>
+            </a:effectRef>
+            <a:fontRef idx="minor">
+              <a:schemeClr val="tx1"/>
+            </a:fontRef>
+          </p:style>
+        </p:cxnSp>
+      </p:grpSp>
       <p:sp>
         <p:nvSpPr>
           <p:cNvPr id="2" name="직사각형 1">
@@ -6276,7 +6297,7 @@
           <a:p>
             <a:pPr algn="ctr"/>
             <a:r>
-              <a:rPr lang="en-US" altLang="ko-KR" sz="4800" b="1" dirty="0">
+              <a:rPr lang="en-US" altLang="ko-KR" sz="4800" b="1">
                 <a:solidFill>
                   <a:srgbClr val="FFFF00"/>
                 </a:solidFill>
@@ -6286,14 +6307,14 @@
               <a:t>&lt;</a:t>
             </a:r>
             <a:r>
-              <a:rPr lang="ko-KR" altLang="en-US" sz="4800" b="1" dirty="0">
+              <a:rPr lang="ko-KR" altLang="en-US" sz="4800" b="1">
                 <a:solidFill>
                   <a:srgbClr val="FFFF00"/>
                 </a:solidFill>
                 <a:ea typeface="맑은 고딕"/>
                 <a:cs typeface="Calibri"/>
               </a:rPr>
-              <a:t>기술안전점검</a:t>
+              <a:t>안전점검</a:t>
             </a:r>
             <a:r>
               <a:rPr lang="en-US" altLang="ko-KR" sz="4800" b="1" dirty="0">
@@ -6336,7 +6357,7 @@
                 <a:ea typeface="맑은 고딕"/>
                 <a:cs typeface="Calibri"/>
               </a:rPr>
-              <a:t>: 26.05.19 ~ 20</a:t>
+              <a:t>: 26.06.00 ~ 00</a:t>
             </a:r>
           </a:p>
         </p:txBody>
